--- a/classes/parte-9-forense-digital-y-respuesta-a-incidentes/218-reporte-forense-y-aspectos-legales/clase-218-presentacion.pptx
+++ b/classes/parte-9-forense-digital-y-respuesta-a-incidentes/218-reporte-forense-y-aspectos-legales/clase-218-presentacion.pptx
@@ -17,6 +17,11 @@
     <p:sldId id="265" r:id="rId16"/>
     <p:sldId id="266" r:id="rId17"/>
     <p:sldId id="267" r:id="rId18"/>
+    <p:sldId id="268" r:id="rId19"/>
+    <p:sldId id="269" r:id="rId20"/>
+    <p:sldId id="270" r:id="rId21"/>
+    <p:sldId id="271" r:id="rId22"/>
+    <p:sldId id="272" r:id="rId23"/>
   </p:sldIdLst>
   <p:sldSz cx="9144000" cy="6858000" type="screen4x3"/>
   <p:notesSz cx="6858000" cy="9144000"/>
@@ -3198,7 +3203,7 @@
                   <a:srgbClr val="0B3D2E"/>
                 </a:solidFill>
               </a:rPr>
-              <a:t>⚠️ Errores comunes</a:t>
+              <a:t>🧰 Herramientas y preparación</a:t>
             </a:r>
           </a:p>
         </p:txBody>
@@ -3236,67 +3241,52 @@
                   <a:srgbClr val="22282E"/>
                 </a:solidFill>
               </a:rPr>
-              <a:t>•  El tribunal rechaza la evidencia — Custodia rota o método no fiable. Documenta todo y usa procesos reconocidos.</a:t>
-            </a:r>
-          </a:p>
-          <a:p>
-            <a:pPr>
-              <a:spcAft>
-                <a:spcPts val="600"/>
-              </a:spcAft>
-            </a:pPr>
-            <a:r>
-              <a:rPr sz="1500">
-                <a:solidFill>
-                  <a:srgbClr val="22282E"/>
-                </a:solidFill>
-              </a:rPr>
-              <a:t>•  Mezclas hecho y opinión — Se pierde credibilidad. Sepáralos explícitamente.</a:t>
-            </a:r>
-          </a:p>
-          <a:p>
-            <a:pPr>
-              <a:spcAft>
-                <a:spcPts val="600"/>
-              </a:spcAft>
-            </a:pPr>
-            <a:r>
-              <a:rPr sz="1500">
-                <a:solidFill>
-                  <a:srgbClr val="22282E"/>
-                </a:solidFill>
-              </a:rPr>
-              <a:t>•  Dirección no entiende el informe — Demasiada jerga. Añade resumen ejecutivo claro.</a:t>
-            </a:r>
-          </a:p>
-          <a:p>
-            <a:pPr>
-              <a:spcAft>
-                <a:spcPts val="600"/>
-              </a:spcAft>
-            </a:pPr>
-            <a:r>
-              <a:rPr sz="1500">
-                <a:solidFill>
-                  <a:srgbClr val="22282E"/>
-                </a:solidFill>
-              </a:rPr>
-              <a:t>•  No puedes reproducir tu análisis — Faltan versiones/comandos. Registra la metodología completa.</a:t>
-            </a:r>
-          </a:p>
-          <a:p>
-            <a:pPr>
-              <a:spcAft>
-                <a:spcPts val="600"/>
-              </a:spcAft>
-            </a:pPr>
-            <a:r>
-              <a:rPr sz="1500">
-                <a:solidFill>
-                  <a:srgbClr val="22282E"/>
-                </a:solidFill>
-              </a:rPr>
-              <a:t>•  Notificaste tarde la brecha — Ignoraste plazos legales. Conoce el marco (72 h en GDPR).</a:t>
+              <a:t>•  Plantilla de informe: portada, resumen ejecutivo, alcance, metodología, hallazgos, línea de tiempo, conclusiones, anexos.</a:t>
+            </a:r>
+          </a:p>
+          <a:p>
+            <a:pPr>
+              <a:spcAft>
+                <a:spcPts val="600"/>
+              </a:spcAft>
+            </a:pPr>
+            <a:r>
+              <a:rPr sz="1500">
+                <a:solidFill>
+                  <a:srgbClr val="22282E"/>
+                </a:solidFill>
+              </a:rPr>
+              <a:t>•  Trazabilidad: hashes, capturas y referencias a cada artefacto.</a:t>
+            </a:r>
+          </a:p>
+          <a:p>
+            <a:pPr>
+              <a:spcAft>
+                <a:spcPts val="600"/>
+              </a:spcAft>
+            </a:pPr>
+            <a:r>
+              <a:rPr sz="1500">
+                <a:solidFill>
+                  <a:srgbClr val="22282E"/>
+                </a:solidFill>
+              </a:rPr>
+              <a:t>•  Marco legal: familiarízate con GDPR, y con la normativa de tu país (en Chile, la Ley 19.628 y la Ley 21.459 de delitos informáticos, por ejemplo).</a:t>
+            </a:r>
+          </a:p>
+          <a:p>
+            <a:pPr>
+              <a:spcAft>
+                <a:spcPts val="600"/>
+              </a:spcAft>
+            </a:pPr>
+            <a:r>
+              <a:rPr sz="1500">
+                <a:solidFill>
+                  <a:srgbClr val="22282E"/>
+                </a:solidFill>
+              </a:rPr>
+              <a:t>•  Ejercicio aplicado: redacción, no herramientas técnicas.</a:t>
             </a:r>
           </a:p>
         </p:txBody>
@@ -3347,7 +3337,7 @@
                   <a:srgbClr val="0B3D2E"/>
                 </a:solidFill>
               </a:rPr>
-              <a:t>❓ Preguntas frecuentes</a:t>
+              <a:t>🧪 Laboratorio guiado</a:t>
             </a:r>
           </a:p>
         </p:txBody>
@@ -3385,97 +3375,97 @@
                   <a:srgbClr val="22282E"/>
                 </a:solidFill>
               </a:rPr>
-              <a:t>•  ❓ ¿Qué hace admisible la evidencia?</a:t>
-            </a:r>
-          </a:p>
-          <a:p>
-            <a:pPr>
-              <a:spcAft>
-                <a:spcPts val="600"/>
-              </a:spcAft>
-            </a:pPr>
-            <a:r>
-              <a:rPr sz="1500">
-                <a:solidFill>
-                  <a:srgbClr val="22282E"/>
-                </a:solidFill>
-              </a:rPr>
-              <a:t>•  Un método fiable y documentado, integridad probada por hashes y una cadena de custodia sin huecos.</a:t>
-            </a:r>
-          </a:p>
-          <a:p>
-            <a:pPr>
-              <a:spcAft>
-                <a:spcPts val="600"/>
-              </a:spcAft>
-            </a:pPr>
-            <a:r>
-              <a:rPr sz="1500">
-                <a:solidFill>
-                  <a:srgbClr val="22282E"/>
-                </a:solidFill>
-              </a:rPr>
-              <a:t>•  ❓ ¿Puedo dar opiniones en el informe?</a:t>
-            </a:r>
-          </a:p>
-          <a:p>
-            <a:pPr>
-              <a:spcAft>
-                <a:spcPts val="600"/>
-              </a:spcAft>
-            </a:pPr>
-            <a:r>
-              <a:rPr sz="1500">
-                <a:solidFill>
-                  <a:srgbClr val="22282E"/>
-                </a:solidFill>
-              </a:rPr>
-              <a:t>•  Sí, como perito, pero identificadas como opinión profesional y fundadas en hechos, separadas de estos.</a:t>
-            </a:r>
-          </a:p>
-          <a:p>
-            <a:pPr>
-              <a:spcAft>
-                <a:spcPts val="600"/>
-              </a:spcAft>
-            </a:pPr>
-            <a:r>
-              <a:rPr sz="1500">
-                <a:solidFill>
-                  <a:srgbClr val="22282E"/>
-                </a:solidFill>
-              </a:rPr>
-              <a:t>•  ❓ ¿Debo notificar toda brecha?</a:t>
-            </a:r>
-          </a:p>
-          <a:p>
-            <a:pPr>
-              <a:spcAft>
-                <a:spcPts val="600"/>
-              </a:spcAft>
-            </a:pPr>
-            <a:r>
-              <a:rPr sz="1500">
-                <a:solidFill>
-                  <a:srgbClr val="22282E"/>
-                </a:solidFill>
-              </a:rPr>
-              <a:t>•  Depende de la jurisdicción y del dato afectado. GDPR exige notificar a la autoridad en 72 h ciertas brechas de datos personales; consulta la ley local.</a:t>
-            </a:r>
-          </a:p>
-          <a:p>
-            <a:pPr>
-              <a:spcAft>
-                <a:spcPts val="600"/>
-              </a:spcAft>
-            </a:pPr>
-            <a:r>
-              <a:rPr sz="1500">
-                <a:solidFill>
-                  <a:srgbClr val="22282E"/>
-                </a:solidFill>
-              </a:rPr>
-              <a:t>•  ❓ ¿Cuántas versiones del informe hago?</a:t>
+              <a:t>•  Crea la portada: caso, examinador, fechas, clasificación de confidencialidad.</a:t>
+            </a:r>
+          </a:p>
+          <a:p>
+            <a:pPr>
+              <a:spcAft>
+                <a:spcPts val="600"/>
+              </a:spcAft>
+            </a:pPr>
+            <a:r>
+              <a:rPr sz="1500">
+                <a:solidFill>
+                  <a:srgbClr val="22282E"/>
+                </a:solidFill>
+              </a:rPr>
+              <a:t>•  Escribe el resumen ejecutivo (media página, sin jerga): qué pasó, impacto y recomendación clave, para dirección.</a:t>
+            </a:r>
+          </a:p>
+          <a:p>
+            <a:pPr>
+              <a:spcAft>
+                <a:spcPts val="600"/>
+              </a:spcAft>
+            </a:pPr>
+            <a:r>
+              <a:rPr sz="1500">
+                <a:solidFill>
+                  <a:srgbClr val="22282E"/>
+                </a:solidFill>
+              </a:rPr>
+              <a:t>•  Define alcance y limitaciones: qué se analizó, qué no y por qué.</a:t>
+            </a:r>
+          </a:p>
+          <a:p>
+            <a:pPr>
+              <a:spcAft>
+                <a:spcPts val="600"/>
+              </a:spcAft>
+            </a:pPr>
+            <a:r>
+              <a:rPr sz="1500">
+                <a:solidFill>
+                  <a:srgbClr val="22282E"/>
+                </a:solidFill>
+              </a:rPr>
+              <a:t>•  Documenta la metodología: herramientas, versiones, procedimientos y hashes de las imágenes.</a:t>
+            </a:r>
+          </a:p>
+          <a:p>
+            <a:pPr>
+              <a:spcAft>
+                <a:spcPts val="600"/>
+              </a:spcAft>
+            </a:pPr>
+            <a:r>
+              <a:rPr sz="1500">
+                <a:solidFill>
+                  <a:srgbClr val="22282E"/>
+                </a:solidFill>
+              </a:rPr>
+              <a:t>•  Redacta los hallazgos separando claramente hecho de interpretación. Ejemplo:</a:t>
+            </a:r>
+          </a:p>
+          <a:p>
+            <a:pPr>
+              <a:spcAft>
+                <a:spcPts val="600"/>
+              </a:spcAft>
+            </a:pPr>
+            <a:r>
+              <a:rPr sz="1500">
+                <a:solidFill>
+                  <a:srgbClr val="22282E"/>
+                </a:solidFill>
+              </a:rPr>
+              <a:t>•  Hecho: "El artefacto Prefetch registra la ejecución de x.exe el 2026-07-10 03:14 UTC (SHA-256: …)."</a:t>
+            </a:r>
+          </a:p>
+          <a:p>
+            <a:pPr>
+              <a:spcAft>
+                <a:spcPts val="600"/>
+              </a:spcAft>
+            </a:pPr>
+            <a:r>
+              <a:rPr sz="1500">
+                <a:solidFill>
+                  <a:srgbClr val="22282E"/>
+                </a:solidFill>
+              </a:rPr>
+              <a:t>•  Opinión: "En mi opinión profesional, esto es consistente con la ejecución del malware descrito."</a:t>
             </a:r>
           </a:p>
         </p:txBody>
@@ -3526,7 +3516,7 @@
                   <a:srgbClr val="0B3D2E"/>
                 </a:solidFill>
               </a:rPr>
-              <a:t>🔗 Referencias</a:t>
+              <a:t>✍️ Ejercicios</a:t>
             </a:r>
           </a:p>
         </p:txBody>
@@ -3564,56 +3554,727 @@
                   <a:srgbClr val="22282E"/>
                 </a:solidFill>
               </a:rPr>
-              <a:t>•  SWGDE — Best Practices for Digital Forensics: &lt;https://www.swgde.org/&gt;</a:t>
-            </a:r>
-          </a:p>
-          <a:p>
-            <a:pPr>
-              <a:spcAft>
-                <a:spcPts val="600"/>
-              </a:spcAft>
-            </a:pPr>
-            <a:r>
-              <a:rPr sz="1500">
-                <a:solidFill>
-                  <a:srgbClr val="22282E"/>
-                </a:solidFill>
-              </a:rPr>
-              <a:t>•  NIST SP 800-86: &lt;https://csrc.nist.gov/publications/detail/sp/800-86/final&gt;</a:t>
-            </a:r>
-          </a:p>
-          <a:p>
-            <a:pPr>
-              <a:spcAft>
-                <a:spcPts val="600"/>
-              </a:spcAft>
-            </a:pPr>
-            <a:r>
-              <a:rPr sz="1500">
-                <a:solidFill>
-                  <a:srgbClr val="22282E"/>
-                </a:solidFill>
-              </a:rPr>
-              <a:t>•  Reglamento (UE) 2016/679 (GDPR): &lt;https://eur-lex.europa.eu/eli/reg/2016/679/oj&gt;</a:t>
-            </a:r>
-          </a:p>
-          <a:p>
-            <a:pPr>
-              <a:spcAft>
-                <a:spcPts val="600"/>
-              </a:spcAft>
-            </a:pPr>
-            <a:r>
-              <a:rPr sz="1500">
-                <a:solidFill>
-                  <a:srgbClr val="22282E"/>
-                </a:solidFill>
-              </a:rPr>
-              <a:t>•  ISO/IEC 27037 — Digital evidence handling: &lt;https://www.iso.org/standard/44381.html&gt;</a:t>
-            </a:r>
-          </a:p>
-        </p:txBody>
-      </p:sp>
+              <a:t>•  Escribe un resumen ejecutivo de media página para un caso.</a:t>
+            </a:r>
+          </a:p>
+          <a:p>
+            <a:pPr>
+              <a:spcAft>
+                <a:spcPts val="600"/>
+              </a:spcAft>
+            </a:pPr>
+            <a:r>
+              <a:rPr sz="1500">
+                <a:solidFill>
+                  <a:srgbClr val="22282E"/>
+                </a:solidFill>
+              </a:rPr>
+              <a:t>•  Reescribe tres hallazgos separando hecho de opinión.</a:t>
+            </a:r>
+          </a:p>
+          <a:p>
+            <a:pPr>
+              <a:spcAft>
+                <a:spcPts val="600"/>
+              </a:spcAft>
+            </a:pPr>
+            <a:r>
+              <a:rPr sz="1500">
+                <a:solidFill>
+                  <a:srgbClr val="22282E"/>
+                </a:solidFill>
+              </a:rPr>
+              <a:t>•  Documenta la metodología con herramientas y versiones.</a:t>
+            </a:r>
+          </a:p>
+          <a:p>
+            <a:pPr>
+              <a:spcAft>
+                <a:spcPts val="600"/>
+              </a:spcAft>
+            </a:pPr>
+            <a:r>
+              <a:rPr sz="1500">
+                <a:solidFill>
+                  <a:srgbClr val="22282E"/>
+                </a:solidFill>
+              </a:rPr>
+              <a:t>•  Redacta la sección de cadena de custodia de un ítem.</a:t>
+            </a:r>
+          </a:p>
+          <a:p>
+            <a:pPr>
+              <a:spcAft>
+                <a:spcPts val="600"/>
+              </a:spcAft>
+            </a:pPr>
+            <a:r>
+              <a:rPr sz="1500">
+                <a:solidFill>
+                  <a:srgbClr val="22282E"/>
+                </a:solidFill>
+              </a:rPr>
+              <a:t>•  Adapta un hallazgo técnico para una audiencia legal.</a:t>
+            </a:r>
+          </a:p>
+          <a:p>
+            <a:pPr>
+              <a:spcAft>
+                <a:spcPts val="600"/>
+              </a:spcAft>
+            </a:pPr>
+            <a:r>
+              <a:rPr sz="1500">
+                <a:solidFill>
+                  <a:srgbClr val="22282E"/>
+                </a:solidFill>
+              </a:rPr>
+              <a:t>•  Enumera las obligaciones de notificación bajo GDPR.</a:t>
+            </a:r>
+          </a:p>
+        </p:txBody>
+      </p:sp>
+    </p:spTree>
+  </p:cSld>
+  <p:clrMapOvr>
+    <a:masterClrMapping/>
+  </p:clrMapOvr>
+</p:sld>
+</file>
+
+<file path=ppt/slides/slide13.xml><?xml version="1.0" encoding="utf-8"?>
+<p:sld xmlns:a="http://schemas.openxmlformats.org/drawingml/2006/main" xmlns:p="http://schemas.openxmlformats.org/presentationml/2006/main" xmlns:r="http://schemas.openxmlformats.org/officeDocument/2006/relationships">
+  <p:cSld>
+    <p:spTree>
+      <p:nvGrpSpPr>
+        <p:cNvPr id="1" name=""/>
+        <p:cNvGrpSpPr/>
+        <p:nvPr/>
+      </p:nvGrpSpPr>
+      <p:grpSpPr/>
+      <p:sp>
+        <p:nvSpPr>
+          <p:cNvPr id="2" name="TextBox 1"/>
+          <p:cNvSpPr txBox="1"/>
+          <p:nvPr/>
+        </p:nvSpPr>
+        <p:spPr>
+          <a:xfrm>
+            <a:off x="457200" y="320040"/>
+            <a:ext cx="8229600" cy="822960"/>
+          </a:xfrm>
+          <a:prstGeom prst="rect">
+            <a:avLst/>
+          </a:prstGeom>
+          <a:noFill/>
+        </p:spPr>
+        <p:txBody>
+          <a:bodyPr wrap="square">
+            <a:spAutoFit/>
+          </a:bodyPr>
+          <a:lstStyle/>
+          <a:p>
+            <a:r>
+              <a:rPr sz="2600" b="1">
+                <a:solidFill>
+                  <a:srgbClr val="0B3D2E"/>
+                </a:solidFill>
+              </a:rPr>
+              <a:t>📝 Reto verificable</a:t>
+            </a:r>
+          </a:p>
+        </p:txBody>
+      </p:sp>
+      <p:sp>
+        <p:nvSpPr>
+          <p:cNvPr id="3" name="TextBox 2"/>
+          <p:cNvSpPr txBox="1"/>
+          <p:nvPr/>
+        </p:nvSpPr>
+        <p:spPr>
+          <a:xfrm>
+            <a:off x="457200" y="1280160"/>
+            <a:ext cx="8229600" cy="4937760"/>
+          </a:xfrm>
+          <a:prstGeom prst="rect">
+            <a:avLst/>
+          </a:prstGeom>
+          <a:noFill/>
+        </p:spPr>
+        <p:txBody>
+          <a:bodyPr wrap="square">
+            <a:spAutoFit/>
+          </a:bodyPr>
+          <a:lstStyle/>
+          <a:p>
+            <a:pPr>
+              <a:spcAft>
+                <a:spcPts val="600"/>
+              </a:spcAft>
+            </a:pPr>
+            <a:r>
+              <a:rPr sz="1500">
+                <a:solidFill>
+                  <a:srgbClr val="22282E"/>
+                </a:solidFill>
+              </a:rPr>
+              <a:t>•  Redacta un informe forense completo de un caso que investigaste, con todas las secciones, hallazgos que distingan hecho de opinión, cadena de custodia trazable y una versión ejecutiva aparte.</a:t>
+            </a:r>
+          </a:p>
+          <a:p>
+            <a:pPr>
+              <a:spcAft>
+                <a:spcPts val="600"/>
+              </a:spcAft>
+            </a:pPr>
+            <a:r>
+              <a:rPr sz="1500">
+                <a:solidFill>
+                  <a:srgbClr val="22282E"/>
+                </a:solidFill>
+              </a:rPr>
+              <a:t>•  Criterio de aceptación: el informe permite a un tercero reproducir el análisis (herramientas, versiones, parámetros y hashes), cada hallazgo separa hecho de interpretación, toda discontinuidad de…</a:t>
+            </a:r>
+          </a:p>
+        </p:txBody>
+      </p:sp>
+    </p:spTree>
+  </p:cSld>
+  <p:clrMapOvr>
+    <a:masterClrMapping/>
+  </p:clrMapOvr>
+</p:sld>
+</file>
+
+<file path=ppt/slides/slide14.xml><?xml version="1.0" encoding="utf-8"?>
+<p:sld xmlns:a="http://schemas.openxmlformats.org/drawingml/2006/main" xmlns:p="http://schemas.openxmlformats.org/presentationml/2006/main" xmlns:r="http://schemas.openxmlformats.org/officeDocument/2006/relationships">
+  <p:cSld>
+    <p:spTree>
+      <p:nvGrpSpPr>
+        <p:cNvPr id="1" name=""/>
+        <p:cNvGrpSpPr/>
+        <p:nvPr/>
+      </p:nvGrpSpPr>
+      <p:grpSpPr/>
+      <p:sp>
+        <p:nvSpPr>
+          <p:cNvPr id="2" name="TextBox 1"/>
+          <p:cNvSpPr txBox="1"/>
+          <p:nvPr/>
+        </p:nvSpPr>
+        <p:spPr>
+          <a:xfrm>
+            <a:off x="457200" y="320040"/>
+            <a:ext cx="8229600" cy="822960"/>
+          </a:xfrm>
+          <a:prstGeom prst="rect">
+            <a:avLst/>
+          </a:prstGeom>
+          <a:noFill/>
+        </p:spPr>
+        <p:txBody>
+          <a:bodyPr wrap="square">
+            <a:spAutoFit/>
+          </a:bodyPr>
+          <a:lstStyle/>
+          <a:p>
+            <a:r>
+              <a:rPr sz="2600" b="1">
+                <a:solidFill>
+                  <a:srgbClr val="0B3D2E"/>
+                </a:solidFill>
+              </a:rPr>
+              <a:t>⚠️ Errores comunes</a:t>
+            </a:r>
+          </a:p>
+        </p:txBody>
+      </p:sp>
+      <p:sp>
+        <p:nvSpPr>
+          <p:cNvPr id="3" name="TextBox 2"/>
+          <p:cNvSpPr txBox="1"/>
+          <p:nvPr/>
+        </p:nvSpPr>
+        <p:spPr>
+          <a:xfrm>
+            <a:off x="457200" y="1280160"/>
+            <a:ext cx="8229600" cy="4937760"/>
+          </a:xfrm>
+          <a:prstGeom prst="rect">
+            <a:avLst/>
+          </a:prstGeom>
+          <a:noFill/>
+        </p:spPr>
+        <p:txBody>
+          <a:bodyPr wrap="square">
+            <a:spAutoFit/>
+          </a:bodyPr>
+          <a:lstStyle/>
+          <a:p>
+            <a:pPr>
+              <a:spcAft>
+                <a:spcPts val="600"/>
+              </a:spcAft>
+            </a:pPr>
+            <a:r>
+              <a:rPr sz="1500">
+                <a:solidFill>
+                  <a:srgbClr val="22282E"/>
+                </a:solidFill>
+              </a:rPr>
+              <a:t>•  Un revisor cuestiona la evidencia — Puede faltar procedencia, explicación del método o validación. Reconstruye la trazabilidad y consulta requisitos del foro aplicable.</a:t>
+            </a:r>
+          </a:p>
+          <a:p>
+            <a:pPr>
+              <a:spcAft>
+                <a:spcPts val="600"/>
+              </a:spcAft>
+            </a:pPr>
+            <a:r>
+              <a:rPr sz="1500">
+                <a:solidFill>
+                  <a:srgbClr val="22282E"/>
+                </a:solidFill>
+              </a:rPr>
+              <a:t>•  Mezclas hecho y opinión — Se pierde credibilidad. Sepáralos explícitamente.</a:t>
+            </a:r>
+          </a:p>
+          <a:p>
+            <a:pPr>
+              <a:spcAft>
+                <a:spcPts val="600"/>
+              </a:spcAft>
+            </a:pPr>
+            <a:r>
+              <a:rPr sz="1500">
+                <a:solidFill>
+                  <a:srgbClr val="22282E"/>
+                </a:solidFill>
+              </a:rPr>
+              <a:t>•  Dirección no entiende el informe — Demasiada jerga. Añade resumen ejecutivo claro.</a:t>
+            </a:r>
+          </a:p>
+          <a:p>
+            <a:pPr>
+              <a:spcAft>
+                <a:spcPts val="600"/>
+              </a:spcAft>
+            </a:pPr>
+            <a:r>
+              <a:rPr sz="1500">
+                <a:solidFill>
+                  <a:srgbClr val="22282E"/>
+                </a:solidFill>
+              </a:rPr>
+              <a:t>•  No puedes reproducir tu análisis — Faltan versiones/comandos. Registra la metodología completa.</a:t>
+            </a:r>
+          </a:p>
+          <a:p>
+            <a:pPr>
+              <a:spcAft>
+                <a:spcPts val="600"/>
+              </a:spcAft>
+            </a:pPr>
+            <a:r>
+              <a:rPr sz="1500">
+                <a:solidFill>
+                  <a:srgbClr val="22282E"/>
+                </a:solidFill>
+              </a:rPr>
+              <a:t>•  No está claro el plazo de notificación — No se determinó jurisdicción, umbral o momento de conocimiento. Escala temprano a asesoría y documenta los hechos.</a:t>
+            </a:r>
+          </a:p>
+        </p:txBody>
+      </p:sp>
+    </p:spTree>
+  </p:cSld>
+  <p:clrMapOvr>
+    <a:masterClrMapping/>
+  </p:clrMapOvr>
+</p:sld>
+</file>
+
+<file path=ppt/slides/slide15.xml><?xml version="1.0" encoding="utf-8"?>
+<p:sld xmlns:a="http://schemas.openxmlformats.org/drawingml/2006/main" xmlns:p="http://schemas.openxmlformats.org/presentationml/2006/main" xmlns:r="http://schemas.openxmlformats.org/officeDocument/2006/relationships">
+  <p:cSld>
+    <p:spTree>
+      <p:nvGrpSpPr>
+        <p:cNvPr id="1" name=""/>
+        <p:cNvGrpSpPr/>
+        <p:nvPr/>
+      </p:nvGrpSpPr>
+      <p:grpSpPr/>
+      <p:sp>
+        <p:nvSpPr>
+          <p:cNvPr id="2" name="TextBox 1"/>
+          <p:cNvSpPr txBox="1"/>
+          <p:nvPr/>
+        </p:nvSpPr>
+        <p:spPr>
+          <a:xfrm>
+            <a:off x="457200" y="320040"/>
+            <a:ext cx="8229600" cy="822960"/>
+          </a:xfrm>
+          <a:prstGeom prst="rect">
+            <a:avLst/>
+          </a:prstGeom>
+          <a:noFill/>
+        </p:spPr>
+        <p:txBody>
+          <a:bodyPr wrap="square">
+            <a:spAutoFit/>
+          </a:bodyPr>
+          <a:lstStyle/>
+          <a:p>
+            <a:r>
+              <a:rPr sz="2600" b="1">
+                <a:solidFill>
+                  <a:srgbClr val="0B3D2E"/>
+                </a:solidFill>
+              </a:rPr>
+              <a:t>❓ Preguntas frecuentes</a:t>
+            </a:r>
+          </a:p>
+        </p:txBody>
+      </p:sp>
+      <p:sp>
+        <p:nvSpPr>
+          <p:cNvPr id="3" name="TextBox 2"/>
+          <p:cNvSpPr txBox="1"/>
+          <p:nvPr/>
+        </p:nvSpPr>
+        <p:spPr>
+          <a:xfrm>
+            <a:off x="457200" y="1280160"/>
+            <a:ext cx="8229600" cy="4937760"/>
+          </a:xfrm>
+          <a:prstGeom prst="rect">
+            <a:avLst/>
+          </a:prstGeom>
+          <a:noFill/>
+        </p:spPr>
+        <p:txBody>
+          <a:bodyPr wrap="square">
+            <a:spAutoFit/>
+          </a:bodyPr>
+          <a:lstStyle/>
+          <a:p>
+            <a:pPr>
+              <a:spcAft>
+                <a:spcPts val="600"/>
+              </a:spcAft>
+            </a:pPr>
+            <a:r>
+              <a:rPr sz="1500">
+                <a:solidFill>
+                  <a:srgbClr val="22282E"/>
+                </a:solidFill>
+              </a:rPr>
+              <a:t>•  ❓ ¿Qué hace admisible la evidencia?</a:t>
+            </a:r>
+          </a:p>
+          <a:p>
+            <a:pPr>
+              <a:spcAft>
+                <a:spcPts val="600"/>
+              </a:spcAft>
+            </a:pPr>
+            <a:r>
+              <a:rPr sz="1500">
+                <a:solidFill>
+                  <a:srgbClr val="22282E"/>
+                </a:solidFill>
+              </a:rPr>
+              <a:t>•  No existe una fórmula universal. Se documentan método, integridad, procedencia, custodia, competencia y limitaciones, y se evalúan las reglas del proceso y jurisdicción con asesoría competente.</a:t>
+            </a:r>
+          </a:p>
+          <a:p>
+            <a:pPr>
+              <a:spcAft>
+                <a:spcPts val="600"/>
+              </a:spcAft>
+            </a:pPr>
+            <a:r>
+              <a:rPr sz="1500">
+                <a:solidFill>
+                  <a:srgbClr val="22282E"/>
+                </a:solidFill>
+              </a:rPr>
+              <a:t>•  ❓ ¿Puedo dar opiniones en el informe?</a:t>
+            </a:r>
+          </a:p>
+          <a:p>
+            <a:pPr>
+              <a:spcAft>
+                <a:spcPts val="600"/>
+              </a:spcAft>
+            </a:pPr>
+            <a:r>
+              <a:rPr sz="1500">
+                <a:solidFill>
+                  <a:srgbClr val="22282E"/>
+                </a:solidFill>
+              </a:rPr>
+              <a:t>•  Sí, como perito, pero identificadas como opinión profesional y fundadas en hechos, separadas de estos.</a:t>
+            </a:r>
+          </a:p>
+          <a:p>
+            <a:pPr>
+              <a:spcAft>
+                <a:spcPts val="600"/>
+              </a:spcAft>
+            </a:pPr>
+            <a:r>
+              <a:rPr sz="1500">
+                <a:solidFill>
+                  <a:srgbClr val="22282E"/>
+                </a:solidFill>
+              </a:rPr>
+              <a:t>•  ❓ ¿Debo notificar toda brecha?</a:t>
+            </a:r>
+          </a:p>
+          <a:p>
+            <a:pPr>
+              <a:spcAft>
+                <a:spcPts val="600"/>
+              </a:spcAft>
+            </a:pPr>
+            <a:r>
+              <a:rPr sz="1500">
+                <a:solidFill>
+                  <a:srgbClr val="22282E"/>
+                </a:solidFill>
+              </a:rPr>
+              <a:t>•  Depende de la jurisdicción y del dato afectado. GDPR exige notificar a la autoridad en 72 h ciertas brechas de datos personales; consulta la ley local.</a:t>
+            </a:r>
+          </a:p>
+          <a:p>
+            <a:pPr>
+              <a:spcAft>
+                <a:spcPts val="600"/>
+              </a:spcAft>
+            </a:pPr>
+            <a:r>
+              <a:rPr sz="1500">
+                <a:solidFill>
+                  <a:srgbClr val="22282E"/>
+                </a:solidFill>
+              </a:rPr>
+              <a:t>•  ❓ ¿Cuántas versiones del informe hago?</a:t>
+            </a:r>
+          </a:p>
+        </p:txBody>
+      </p:sp>
+    </p:spTree>
+  </p:cSld>
+  <p:clrMapOvr>
+    <a:masterClrMapping/>
+  </p:clrMapOvr>
+</p:sld>
+</file>
+
+<file path=ppt/slides/slide16.xml><?xml version="1.0" encoding="utf-8"?>
+<p:sld xmlns:a="http://schemas.openxmlformats.org/drawingml/2006/main" xmlns:p="http://schemas.openxmlformats.org/presentationml/2006/main" xmlns:r="http://schemas.openxmlformats.org/officeDocument/2006/relationships">
+  <p:cSld>
+    <p:spTree>
+      <p:nvGrpSpPr>
+        <p:cNvPr id="1" name=""/>
+        <p:cNvGrpSpPr/>
+        <p:nvPr/>
+      </p:nvGrpSpPr>
+      <p:grpSpPr/>
+      <p:sp>
+        <p:nvSpPr>
+          <p:cNvPr id="2" name="TextBox 1"/>
+          <p:cNvSpPr txBox="1"/>
+          <p:nvPr/>
+        </p:nvSpPr>
+        <p:spPr>
+          <a:xfrm>
+            <a:off x="457200" y="320040"/>
+            <a:ext cx="8229600" cy="822960"/>
+          </a:xfrm>
+          <a:prstGeom prst="rect">
+            <a:avLst/>
+          </a:prstGeom>
+          <a:noFill/>
+        </p:spPr>
+        <p:txBody>
+          <a:bodyPr wrap="square">
+            <a:spAutoFit/>
+          </a:bodyPr>
+          <a:lstStyle/>
+          <a:p>
+            <a:r>
+              <a:rPr sz="2600" b="1">
+                <a:solidFill>
+                  <a:srgbClr val="0B3D2E"/>
+                </a:solidFill>
+              </a:rPr>
+              <a:t>🔗 Referencias verificables y alcance</a:t>
+            </a:r>
+          </a:p>
+        </p:txBody>
+      </p:sp>
+      <p:sp>
+        <p:nvSpPr>
+          <p:cNvPr id="3" name="TextBox 2"/>
+          <p:cNvSpPr txBox="1"/>
+          <p:nvPr/>
+        </p:nvSpPr>
+        <p:spPr>
+          <a:xfrm>
+            <a:off x="457200" y="1280160"/>
+            <a:ext cx="8229600" cy="4937760"/>
+          </a:xfrm>
+          <a:prstGeom prst="rect">
+            <a:avLst/>
+          </a:prstGeom>
+          <a:noFill/>
+        </p:spPr>
+        <p:txBody>
+          <a:bodyPr wrap="square">
+            <a:spAutoFit/>
+          </a:bodyPr>
+          <a:lstStyle/>
+          <a:p>
+            <a:pPr>
+              <a:spcAft>
+                <a:spcPts val="600"/>
+              </a:spcAft>
+            </a:pPr>
+            <a:r>
+              <a:rPr sz="1500">
+                <a:solidFill>
+                  <a:srgbClr val="22282E"/>
+                </a:solidFill>
+              </a:rPr>
+              <a:t>•  NIST SP 800-86: &lt;https://doi.org/10.6028/NIST.SP.800-86&gt; — metodología de TI para recolección, examen, análisis y reporte; el propio documento aclara que no es asesoría legal.</a:t>
+            </a:r>
+          </a:p>
+          <a:p>
+            <a:pPr>
+              <a:spcAft>
+                <a:spcPts val="600"/>
+              </a:spcAft>
+            </a:pPr>
+            <a:r>
+              <a:rPr sz="1500">
+                <a:solidFill>
+                  <a:srgbClr val="22282E"/>
+                </a:solidFill>
+              </a:rPr>
+              <a:t>•  SWGDE Published Documents: &lt;https://www.swgde.org/documents/published&gt; — buenas prácticas y documentos técnicos publicados; se debe seleccionar la versión y disciplina aplicables.</a:t>
+            </a:r>
+          </a:p>
+          <a:p>
+            <a:pPr>
+              <a:spcAft>
+                <a:spcPts val="600"/>
+              </a:spcAft>
+            </a:pPr>
+            <a:r>
+              <a:rPr sz="1500">
+                <a:solidFill>
+                  <a:srgbClr val="22282E"/>
+                </a:solidFill>
+              </a:rPr>
+              <a:t>•  Reglamento (UE) 2016/679, artículo 33: &lt;https://eur-lex.europa.eu/eli/reg/2016/679/oj&gt; — fuente normativa primaria de la regla de notificación; su aplicación requiere analizar rol, conocimiento…</a:t>
+            </a:r>
+          </a:p>
+          <a:p>
+            <a:pPr>
+              <a:spcAft>
+                <a:spcPts val="600"/>
+              </a:spcAft>
+            </a:pPr>
+            <a:r>
+              <a:rPr sz="1500">
+                <a:solidFill>
+                  <a:srgbClr val="22282E"/>
+                </a:solidFill>
+              </a:rPr>
+              <a:t>•  ISO/IEC 27037: &lt;https://www.iso.org/standard/44381.html&gt; — directrices internacionales de identificación, recolección, adquisición y preservación; el texto completo puede requerir acceso de pago y no…</a:t>
+            </a:r>
+          </a:p>
+        </p:txBody>
+      </p:sp>
+    </p:spTree>
+  </p:cSld>
+  <p:clrMapOvr>
+    <a:masterClrMapping/>
+  </p:clrMapOvr>
+</p:sld>
+</file>
+
+<file path=ppt/slides/slide17.xml><?xml version="1.0" encoding="utf-8"?>
+<p:sld xmlns:a="http://schemas.openxmlformats.org/drawingml/2006/main" xmlns:p="http://schemas.openxmlformats.org/presentationml/2006/main" xmlns:r="http://schemas.openxmlformats.org/officeDocument/2006/relationships">
+  <p:cSld>
+    <p:spTree>
+      <p:nvGrpSpPr>
+        <p:cNvPr id="1" name=""/>
+        <p:cNvGrpSpPr/>
+        <p:nvPr/>
+      </p:nvGrpSpPr>
+      <p:grpSpPr/>
+      <p:sp>
+        <p:nvSpPr>
+          <p:cNvPr id="2" name="TextBox 1"/>
+          <p:cNvSpPr txBox="1"/>
+          <p:nvPr/>
+        </p:nvSpPr>
+        <p:spPr>
+          <a:xfrm>
+            <a:off x="457200" y="274320"/>
+            <a:ext cx="8229600" cy="640080"/>
+          </a:xfrm>
+          <a:prstGeom prst="rect">
+            <a:avLst/>
+          </a:prstGeom>
+          <a:noFill/>
+        </p:spPr>
+        <p:txBody>
+          <a:bodyPr wrap="square">
+            <a:spAutoFit/>
+          </a:bodyPr>
+          <a:lstStyle/>
+          <a:p>
+            <a:r>
+              <a:rPr sz="2200" b="1">
+                <a:solidFill>
+                  <a:srgbClr val="0B3D2E"/>
+                </a:solidFill>
+              </a:rPr>
+              <a:t>Diagrama de la clase</a:t>
+            </a:r>
+          </a:p>
+        </p:txBody>
+      </p:sp>
+      <p:pic>
+        <p:nvPicPr>
+          <p:cNvPr id="3" name="Picture 2" descr="3a991168211131ad.png"/>
+          <p:cNvPicPr>
+            <a:picLocks noChangeAspect="1"/>
+          </p:cNvPicPr>
+          <p:nvPr/>
+        </p:nvPicPr>
+        <p:blipFill>
+          <a:blip r:embed="rId2"/>
+          <a:stretch>
+            <a:fillRect/>
+          </a:stretch>
+        </p:blipFill>
+        <p:spPr>
+          <a:xfrm>
+            <a:off x="457200" y="3584448"/>
+            <a:ext cx="8229600" cy="329184"/>
+          </a:xfrm>
+          <a:prstGeom prst="rect">
+            <a:avLst/>
+          </a:prstGeom>
+        </p:spPr>
+      </p:pic>
     </p:spTree>
   </p:cSld>
   <p:clrMapOvr>
@@ -3698,7 +4359,7 @@
                   <a:srgbClr val="22282E"/>
                 </a:solidFill>
               </a:rPr>
-              <a:t>•  Aprender a redactar un informe forense defendible y a manejar los aspectos legales de una investigación: admisibilidad de la evidencia, cadena de custodia documentada, testimonio pericial, y consideraciones de privacidad y notificación (GDPR y leyes locales). Al terminar sabrás producir un informe que se sostenga ante un tribunal y comunicarlo a distintas audiencias.</a:t>
+              <a:t>•  Aprender a redactar un informe forense defendible y a manejar los aspectos legales de una investigación: admisibilidad de la evidencia, cadena de custodia documentada, testimonio pericial, y…</a:t>
             </a:r>
           </a:p>
         </p:txBody>
@@ -3832,7 +4493,7 @@
                   <a:srgbClr val="22282E"/>
                 </a:solidFill>
               </a:rPr>
-              <a:t>•  Garantizar la admisibilidad y la cadena de custodia.</a:t>
+              <a:t>•  Documentar fiabilidad, custodia y limitaciones para que el foro aplicable pueda evaluarlas.</a:t>
             </a:r>
           </a:p>
           <a:p>
@@ -3981,7 +4642,7 @@
                   <a:srgbClr val="22282E"/>
                 </a:solidFill>
               </a:rPr>
-              <a:t>•  3 — Admisibilidad de evidencia</a:t>
+              <a:t>•  3 — Fiabilidad y requisitos procesales</a:t>
             </a:r>
           </a:p>
           <a:p>
@@ -4092,7 +4753,7 @@
                   <a:srgbClr val="0B3D2E"/>
                 </a:solidFill>
               </a:rPr>
-              <a:t>📖 Definiciones y características</a:t>
+              <a:t>🧠 Explicación en profundidad</a:t>
             </a:r>
           </a:p>
         </p:txBody>
@@ -4130,97 +4791,97 @@
                   <a:srgbClr val="22282E"/>
                 </a:solidFill>
               </a:rPr>
-              <a:t>•  Informe forense: documento que expone método, evidencia y conclusiones. Característica: reproducible por un tercero.</a:t>
-            </a:r>
-          </a:p>
-          <a:p>
-            <a:pPr>
-              <a:spcAft>
-                <a:spcPts val="600"/>
-              </a:spcAft>
-            </a:pPr>
-            <a:r>
-              <a:rPr sz="1500">
-                <a:solidFill>
-                  <a:srgbClr val="22282E"/>
-                </a:solidFill>
-              </a:rPr>
-              <a:t>•  Hecho vs. opinión: el hecho es observable y verificable; la opinión es interpretación fundada. Característica: deben distinguirse siempre.</a:t>
-            </a:r>
-          </a:p>
-          <a:p>
-            <a:pPr>
-              <a:spcAft>
-                <a:spcPts val="600"/>
-              </a:spcAft>
-            </a:pPr>
-            <a:r>
-              <a:rPr sz="1500">
-                <a:solidFill>
-                  <a:srgbClr val="22282E"/>
-                </a:solidFill>
-              </a:rPr>
-              <a:t>•  Admisibilidad: que la evidencia sea aceptada en un proceso. Característica: exige método fiable y custodia intacta.</a:t>
-            </a:r>
-          </a:p>
-          <a:p>
-            <a:pPr>
-              <a:spcAft>
-                <a:spcPts val="600"/>
-              </a:spcAft>
-            </a:pPr>
-            <a:r>
-              <a:rPr sz="1500">
-                <a:solidFill>
-                  <a:srgbClr val="22282E"/>
-                </a:solidFill>
-              </a:rPr>
-              <a:t>•  Cadena de custodia: registro de manejo de la evidencia. Característica: un hueco puede invalidarla.</a:t>
-            </a:r>
-          </a:p>
-          <a:p>
-            <a:pPr>
-              <a:spcAft>
-                <a:spcPts val="600"/>
-              </a:spcAft>
-            </a:pPr>
-            <a:r>
-              <a:rPr sz="1500">
-                <a:solidFill>
-                  <a:srgbClr val="22282E"/>
-                </a:solidFill>
-              </a:rPr>
-              <a:t>•  Testigo experto: perito que explica hallazgos técnicos al tribunal. Característica: debe ser claro, imparcial y defendible.</a:t>
-            </a:r>
-          </a:p>
-          <a:p>
-            <a:pPr>
-              <a:spcAft>
-                <a:spcPts val="600"/>
-              </a:spcAft>
-            </a:pPr>
-            <a:r>
-              <a:rPr sz="1500">
-                <a:solidFill>
-                  <a:srgbClr val="22282E"/>
-                </a:solidFill>
-              </a:rPr>
-              <a:t>•  Notificación de brecha: obligación legal de informar (p. ej. GDPR: 72 h a la autoridad). Característica: plazos estrictos.</a:t>
-            </a:r>
-          </a:p>
-          <a:p>
-            <a:pPr>
-              <a:spcAft>
-                <a:spcPts val="600"/>
-              </a:spcAft>
-            </a:pPr>
-            <a:r>
-              <a:rPr sz="1500">
-                <a:solidFill>
-                  <a:srgbClr val="22282E"/>
-                </a:solidFill>
-              </a:rPr>
-              <a:t>•  Privacidad: límites sobre qué datos se pueden recolectar/analizar. Característica: varía por jurisdicción y contexto laboral.</a:t>
+              <a:t>•  El informe convierte trabajo técnico en afirmaciones auditables para una audiencia y jurisdicción concretas. Separa alcance, métodos, limitaciones, hechos, inferencias y opinión experta. No ofrece…</a:t>
+            </a:r>
+          </a:p>
+          <a:p>
+            <a:pPr>
+              <a:spcAft>
+                <a:spcPts val="600"/>
+              </a:spcAft>
+            </a:pPr>
+            <a:r>
+              <a:rPr sz="1500">
+                <a:solidFill>
+                  <a:srgbClr val="22282E"/>
+                </a:solidFill>
+              </a:rPr>
+              <a:t>•  Cada hallazgo cita artefacto, ubicación y procedimiento; capturas ilustran pero no sustituyen evidencia. El lenguaje calibra certeza: observado, consistente con, probablemente o no determinable.…</a:t>
+            </a:r>
+          </a:p>
+          <a:p>
+            <a:pPr>
+              <a:spcAft>
+                <a:spcPts val="600"/>
+              </a:spcAft>
+            </a:pPr>
+            <a:r>
+              <a:rPr sz="1500">
+                <a:solidFill>
+                  <a:srgbClr val="22282E"/>
+                </a:solidFill>
+              </a:rPr>
+              <a:t>•  El informe comienza con mandato, alcance y preguntas autorizadas. Después describe fuentes, adquisición, integridad, herramientas, versiones, parámetros y transformaciones. Un hallazgo conecta una…</a:t>
+            </a:r>
+          </a:p>
+          <a:p>
+            <a:pPr>
+              <a:spcAft>
+                <a:spcPts val="600"/>
+              </a:spcAft>
+            </a:pPr>
+            <a:r>
+              <a:rPr sz="1500">
+                <a:solidFill>
+                  <a:srgbClr val="22282E"/>
+                </a:solidFill>
+              </a:rPr>
+              <a:t>•  La reproducibilidad no exige que toda persona obtenga idéntica interfaz, sino que pueda repetir el procedimiento relevante y evaluar decisiones. Se incluyen hashes, consultas, filtros, zona horaria…</a:t>
+            </a:r>
+          </a:p>
+          <a:p>
+            <a:pPr>
+              <a:spcAft>
+                <a:spcPts val="600"/>
+              </a:spcAft>
+            </a:pPr>
+            <a:r>
+              <a:rPr sz="1500">
+                <a:solidFill>
+                  <a:srgbClr val="22282E"/>
+                </a:solidFill>
+              </a:rPr>
+              <a:t>•  El anexo técnico conserva detalle; el resumen ejecutivo explica impacto, alcance conocido, decisiones y riesgo residual. Legal necesita comprender procedencia, privacidad, privilegio y notificación…</a:t>
+            </a:r>
+          </a:p>
+          <a:p>
+            <a:pPr>
+              <a:spcAft>
+                <a:spcPts val="600"/>
+              </a:spcAft>
+            </a:pPr>
+            <a:r>
+              <a:rPr sz="1500">
+                <a:solidFill>
+                  <a:srgbClr val="22282E"/>
+                </a:solidFill>
+              </a:rPr>
+              <a:t>•  La atribución se formula con especial cuidado. Una cuenta ejecutó una acción no significa que su titular la ejecutó. Una IP puede pertenecer a NAT, VPN o proveedor. El informe presenta explicaciones…</a:t>
+            </a:r>
+          </a:p>
+          <a:p>
+            <a:pPr>
+              <a:spcAft>
+                <a:spcPts val="600"/>
+              </a:spcAft>
+            </a:pPr>
+            <a:r>
+              <a:rPr sz="1500">
+                <a:solidFill>
+                  <a:srgbClr val="22282E"/>
+                </a:solidFill>
+              </a:rPr>
+              <a:t>•  Admisibilidad, consentimiento, monitoreo laboral, transferencia internacional, retención y notificación dependen de jurisdicción, relación contractual y proceso. NIST SP 800-86 declara expresamente…</a:t>
             </a:r>
           </a:p>
         </p:txBody>
@@ -4271,7 +4932,7 @@
                   <a:srgbClr val="0B3D2E"/>
                 </a:solidFill>
               </a:rPr>
-              <a:t>🧰 Herramientas y preparación</a:t>
+              <a:t>📔 Glosario</a:t>
             </a:r>
           </a:p>
         </p:txBody>
@@ -4309,52 +4970,97 @@
                   <a:srgbClr val="22282E"/>
                 </a:solidFill>
               </a:rPr>
-              <a:t>•  Plantilla de informe: portada, resumen ejecutivo, alcance, metodología, hallazgos, línea de tiempo, conclusiones, anexos.</a:t>
-            </a:r>
-          </a:p>
-          <a:p>
-            <a:pPr>
-              <a:spcAft>
-                <a:spcPts val="600"/>
-              </a:spcAft>
-            </a:pPr>
-            <a:r>
-              <a:rPr sz="1500">
-                <a:solidFill>
-                  <a:srgbClr val="22282E"/>
-                </a:solidFill>
-              </a:rPr>
-              <a:t>•  Trazabilidad: hashes, capturas y referencias a cada artefacto.</a:t>
-            </a:r>
-          </a:p>
-          <a:p>
-            <a:pPr>
-              <a:spcAft>
-                <a:spcPts val="600"/>
-              </a:spcAft>
-            </a:pPr>
-            <a:r>
-              <a:rPr sz="1500">
-                <a:solidFill>
-                  <a:srgbClr val="22282E"/>
-                </a:solidFill>
-              </a:rPr>
-              <a:t>•  Marco legal: familiarízate con GDPR, y con la normativa de tu país (en Chile, la Ley 19.628 y la Ley 21.459 de delitos informáticos, por ejemplo).</a:t>
-            </a:r>
-          </a:p>
-          <a:p>
-            <a:pPr>
-              <a:spcAft>
-                <a:spcPts val="600"/>
-              </a:spcAft>
-            </a:pPr>
-            <a:r>
-              <a:rPr sz="1500">
-                <a:solidFill>
-                  <a:srgbClr val="22282E"/>
-                </a:solidFill>
-              </a:rPr>
-              <a:t>•  Ejercicio aplicado: redacción, no herramientas técnicas.</a:t>
+              <a:t>•  Mandato: autoridad y preguntas autorizadas.</a:t>
+            </a:r>
+          </a:p>
+          <a:p>
+            <a:pPr>
+              <a:spcAft>
+                <a:spcPts val="600"/>
+              </a:spcAft>
+            </a:pPr>
+            <a:r>
+              <a:rPr sz="1500">
+                <a:solidFill>
+                  <a:srgbClr val="22282E"/>
+                </a:solidFill>
+              </a:rPr>
+              <a:t>•  Hallazgo: conclusión respaldada por evidencia citada.</a:t>
+            </a:r>
+          </a:p>
+          <a:p>
+            <a:pPr>
+              <a:spcAft>
+                <a:spcPts val="600"/>
+              </a:spcAft>
+            </a:pPr>
+            <a:r>
+              <a:rPr sz="1500">
+                <a:solidFill>
+                  <a:srgbClr val="22282E"/>
+                </a:solidFill>
+              </a:rPr>
+              <a:t>•  Limitación: condición que restringe interpretación.</a:t>
+            </a:r>
+          </a:p>
+          <a:p>
+            <a:pPr>
+              <a:spcAft>
+                <a:spcPts val="600"/>
+              </a:spcAft>
+            </a:pPr>
+            <a:r>
+              <a:rPr sz="1500">
+                <a:solidFill>
+                  <a:srgbClr val="22282E"/>
+                </a:solidFill>
+              </a:rPr>
+              <a:t>•  Admisibilidad: aceptación de evidencia según reglas aplicables.</a:t>
+            </a:r>
+          </a:p>
+          <a:p>
+            <a:pPr>
+              <a:spcAft>
+                <a:spcPts val="600"/>
+              </a:spcAft>
+            </a:pPr>
+            <a:r>
+              <a:rPr sz="1500">
+                <a:solidFill>
+                  <a:srgbClr val="22282E"/>
+                </a:solidFill>
+              </a:rPr>
+              <a:t>•  Legal hold: obligación de preservar información.</a:t>
+            </a:r>
+          </a:p>
+          <a:p>
+            <a:pPr>
+              <a:spcAft>
+                <a:spcPts val="600"/>
+              </a:spcAft>
+            </a:pPr>
+            <a:r>
+              <a:rPr sz="1500">
+                <a:solidFill>
+                  <a:srgbClr val="22282E"/>
+                </a:solidFill>
+              </a:rPr>
+              <a:t>•  Privilegio: protección jurídica evaluada por asesoría.</a:t>
+            </a:r>
+          </a:p>
+          <a:p>
+            <a:pPr>
+              <a:spcAft>
+                <a:spcPts val="600"/>
+              </a:spcAft>
+            </a:pPr>
+            <a:r>
+              <a:rPr sz="1500">
+                <a:solidFill>
+                  <a:srgbClr val="22282E"/>
+                </a:solidFill>
+              </a:rPr>
+              <a:t>•  Peer review: revisión independiente del trabajo.</a:t>
             </a:r>
           </a:p>
         </p:txBody>
@@ -4405,7 +5111,7 @@
                   <a:srgbClr val="0B3D2E"/>
                 </a:solidFill>
               </a:rPr>
-              <a:t>🧪 Laboratorio guiado</a:t>
+              <a:t>📖 Definiciones y características</a:t>
             </a:r>
           </a:p>
         </p:txBody>
@@ -4443,97 +5149,97 @@
                   <a:srgbClr val="22282E"/>
                 </a:solidFill>
               </a:rPr>
-              <a:t>•  Crea la portada: caso, examinador, fechas, clasificación de confidencialidad.</a:t>
-            </a:r>
-          </a:p>
-          <a:p>
-            <a:pPr>
-              <a:spcAft>
-                <a:spcPts val="600"/>
-              </a:spcAft>
-            </a:pPr>
-            <a:r>
-              <a:rPr sz="1500">
-                <a:solidFill>
-                  <a:srgbClr val="22282E"/>
-                </a:solidFill>
-              </a:rPr>
-              <a:t>•  Escribe el resumen ejecutivo (media página, sin jerga): qué pasó, impacto y recomendación clave, para dirección.</a:t>
-            </a:r>
-          </a:p>
-          <a:p>
-            <a:pPr>
-              <a:spcAft>
-                <a:spcPts val="600"/>
-              </a:spcAft>
-            </a:pPr>
-            <a:r>
-              <a:rPr sz="1500">
-                <a:solidFill>
-                  <a:srgbClr val="22282E"/>
-                </a:solidFill>
-              </a:rPr>
-              <a:t>•  Define alcance y limitaciones: qué se analizó, qué no y por qué.</a:t>
-            </a:r>
-          </a:p>
-          <a:p>
-            <a:pPr>
-              <a:spcAft>
-                <a:spcPts val="600"/>
-              </a:spcAft>
-            </a:pPr>
-            <a:r>
-              <a:rPr sz="1500">
-                <a:solidFill>
-                  <a:srgbClr val="22282E"/>
-                </a:solidFill>
-              </a:rPr>
-              <a:t>•  Documenta la metodología: herramientas, versiones, procedimientos y hashes de las imágenes.</a:t>
-            </a:r>
-          </a:p>
-          <a:p>
-            <a:pPr>
-              <a:spcAft>
-                <a:spcPts val="600"/>
-              </a:spcAft>
-            </a:pPr>
-            <a:r>
-              <a:rPr sz="1500">
-                <a:solidFill>
-                  <a:srgbClr val="22282E"/>
-                </a:solidFill>
-              </a:rPr>
-              <a:t>•  Redacta los hallazgos separando claramente hecho de interpretación. Ejemplo:</a:t>
-            </a:r>
-          </a:p>
-          <a:p>
-            <a:pPr>
-              <a:spcAft>
-                <a:spcPts val="600"/>
-              </a:spcAft>
-            </a:pPr>
-            <a:r>
-              <a:rPr sz="1500">
-                <a:solidFill>
-                  <a:srgbClr val="22282E"/>
-                </a:solidFill>
-              </a:rPr>
-              <a:t>•  Hecho: "El artefacto Prefetch registra la ejecución de x.exe el 2026-07-10 03:14 UTC (SHA-256: …)."</a:t>
-            </a:r>
-          </a:p>
-          <a:p>
-            <a:pPr>
-              <a:spcAft>
-                <a:spcPts val="600"/>
-              </a:spcAft>
-            </a:pPr>
-            <a:r>
-              <a:rPr sz="1500">
-                <a:solidFill>
-                  <a:srgbClr val="22282E"/>
-                </a:solidFill>
-              </a:rPr>
-              <a:t>•  Opinión: "En mi opinión profesional, esto es consistente con la ejecución del malware descrito."</a:t>
+              <a:t>•  Informe forense: documento que expone método, evidencia y conclusiones. Característica: reproducible por un tercero.</a:t>
+            </a:r>
+          </a:p>
+          <a:p>
+            <a:pPr>
+              <a:spcAft>
+                <a:spcPts val="600"/>
+              </a:spcAft>
+            </a:pPr>
+            <a:r>
+              <a:rPr sz="1500">
+                <a:solidFill>
+                  <a:srgbClr val="22282E"/>
+                </a:solidFill>
+              </a:rPr>
+              <a:t>•  Hecho vs. opinión: el hecho es observable y verificable; la opinión es interpretación fundada. Característica: deben distinguirse siempre.</a:t>
+            </a:r>
+          </a:p>
+          <a:p>
+            <a:pPr>
+              <a:spcAft>
+                <a:spcPts val="600"/>
+              </a:spcAft>
+            </a:pPr>
+            <a:r>
+              <a:rPr sz="1500">
+                <a:solidFill>
+                  <a:srgbClr val="22282E"/>
+                </a:solidFill>
+              </a:rPr>
+              <a:t>•  Admisibilidad: decisión regida por reglas de la jurisdicción y el proceso. Característica: método, relevancia, autenticidad y manejo pueden ser evaluados de modo distinto según el foro.</a:t>
+            </a:r>
+          </a:p>
+          <a:p>
+            <a:pPr>
+              <a:spcAft>
+                <a:spcPts val="600"/>
+              </a:spcAft>
+            </a:pPr>
+            <a:r>
+              <a:rPr sz="1500">
+                <a:solidFill>
+                  <a:srgbClr val="22282E"/>
+                </a:solidFill>
+              </a:rPr>
+              <a:t>•  Cadena de custodia: registro cronológico de posesión, transferencia y acciones sobre evidencia. Característica: una discontinuidad debe investigarse y explicarse; su efecto legal no es automático ni…</a:t>
+            </a:r>
+          </a:p>
+          <a:p>
+            <a:pPr>
+              <a:spcAft>
+                <a:spcPts val="600"/>
+              </a:spcAft>
+            </a:pPr>
+            <a:r>
+              <a:rPr sz="1500">
+                <a:solidFill>
+                  <a:srgbClr val="22282E"/>
+                </a:solidFill>
+              </a:rPr>
+              <a:t>•  Testigo experto: perito que explica hallazgos técnicos al tribunal. Característica: debe ser claro, imparcial y defendible.</a:t>
+            </a:r>
+          </a:p>
+          <a:p>
+            <a:pPr>
+              <a:spcAft>
+                <a:spcPts val="600"/>
+              </a:spcAft>
+            </a:pPr>
+            <a:r>
+              <a:rPr sz="1500">
+                <a:solidFill>
+                  <a:srgbClr val="22282E"/>
+                </a:solidFill>
+              </a:rPr>
+              <a:t>•  Notificación de brecha: obligación aplicable bajo un marco y hechos concretos. Característica: autoridad, afectados, umbral y plazo varían; GDPR incorpora la regla condicionada de 72 horas del…</a:t>
+            </a:r>
+          </a:p>
+          <a:p>
+            <a:pPr>
+              <a:spcAft>
+                <a:spcPts val="600"/>
+              </a:spcAft>
+            </a:pPr>
+            <a:r>
+              <a:rPr sz="1500">
+                <a:solidFill>
+                  <a:srgbClr val="22282E"/>
+                </a:solidFill>
+              </a:rPr>
+              <a:t>•  Privacidad: límites sobre qué datos se pueden recolectar/analizar. Característica: varía por jurisdicción y contexto laboral.</a:t>
             </a:r>
           </a:p>
         </p:txBody>
@@ -4584,7 +5290,7 @@
                   <a:srgbClr val="0B3D2E"/>
                 </a:solidFill>
               </a:rPr>
-              <a:t>✍️ Ejercicios</a:t>
+              <a:t>🔍 Caso razonado — dos timestamps en conflicto</a:t>
             </a:r>
           </a:p>
         </p:txBody>
@@ -4622,82 +5328,22 @@
                   <a:srgbClr val="22282E"/>
                 </a:solidFill>
               </a:rPr>
-              <a:t>•  Escribe un resumen ejecutivo de media página para un caso.</a:t>
-            </a:r>
-          </a:p>
-          <a:p>
-            <a:pPr>
-              <a:spcAft>
-                <a:spcPts val="600"/>
-              </a:spcAft>
-            </a:pPr>
-            <a:r>
-              <a:rPr sz="1500">
-                <a:solidFill>
-                  <a:srgbClr val="22282E"/>
-                </a:solidFill>
-              </a:rPr>
-              <a:t>•  Reescribe tres hallazgos separando hecho de opinión.</a:t>
-            </a:r>
-          </a:p>
-          <a:p>
-            <a:pPr>
-              <a:spcAft>
-                <a:spcPts val="600"/>
-              </a:spcAft>
-            </a:pPr>
-            <a:r>
-              <a:rPr sz="1500">
-                <a:solidFill>
-                  <a:srgbClr val="22282E"/>
-                </a:solidFill>
-              </a:rPr>
-              <a:t>•  Documenta la metodología con herramientas y versiones.</a:t>
-            </a:r>
-          </a:p>
-          <a:p>
-            <a:pPr>
-              <a:spcAft>
-                <a:spcPts val="600"/>
-              </a:spcAft>
-            </a:pPr>
-            <a:r>
-              <a:rPr sz="1500">
-                <a:solidFill>
-                  <a:srgbClr val="22282E"/>
-                </a:solidFill>
-              </a:rPr>
-              <a:t>•  Redacta la sección de cadena de custodia de un ítem.</a:t>
-            </a:r>
-          </a:p>
-          <a:p>
-            <a:pPr>
-              <a:spcAft>
-                <a:spcPts val="600"/>
-              </a:spcAft>
-            </a:pPr>
-            <a:r>
-              <a:rPr sz="1500">
-                <a:solidFill>
-                  <a:srgbClr val="22282E"/>
-                </a:solidFill>
-              </a:rPr>
-              <a:t>•  Adapta un hallazgo técnico para una audiencia legal.</a:t>
-            </a:r>
-          </a:p>
-          <a:p>
-            <a:pPr>
-              <a:spcAft>
-                <a:spcPts val="600"/>
-              </a:spcAft>
-            </a:pPr>
-            <a:r>
-              <a:rPr sz="1500">
-                <a:solidFill>
-                  <a:srgbClr val="22282E"/>
-                </a:solidFill>
-              </a:rPr>
-              <a:t>•  Enumera las obligaciones de notificación bajo GDPR.</a:t>
+              <a:t>•  Un informe debe responder si una cuenta exportó datos antes de ser deshabilitada. El log cloud registra la API a 18:04:12 UTC; un archivo local presenta modificación a 14:03:51 sin zona y el host…</a:t>
+            </a:r>
+          </a:p>
+          <a:p>
+            <a:pPr>
+              <a:spcAft>
+                <a:spcPts val="600"/>
+              </a:spcAft>
+            </a:pPr>
+            <a:r>
+              <a:rPr sz="1500">
+                <a:solidFill>
+                  <a:srgbClr val="22282E"/>
+                </a:solidFill>
+              </a:rPr>
+              <a:t>•  El resumen ejecutivo declara acceso observado y alcance conocido. El anexo cita evento, request ID, hash de exportación, comando y corrección temporal. La sección legal identifica que existen datos…</a:t>
             </a:r>
           </a:p>
         </p:txBody>
@@ -4748,7 +5394,7 @@
                   <a:srgbClr val="0B3D2E"/>
                 </a:solidFill>
               </a:rPr>
-              <a:t>📝 Reto verificable</a:t>
+              <a:t>✅ Criterio de dominio</a:t>
             </a:r>
           </a:p>
         </p:txBody>
@@ -4786,22 +5432,7 @@
                   <a:srgbClr val="22282E"/>
                 </a:solidFill>
               </a:rPr>
-              <a:t>•  Redacta un informe forense completo de un caso que investigaste, con todas las secciones, hallazgos que distingan hecho de opinión, cadena de custodia trazable y una versión ejecutiva aparte.</a:t>
-            </a:r>
-          </a:p>
-          <a:p>
-            <a:pPr>
-              <a:spcAft>
-                <a:spcPts val="600"/>
-              </a:spcAft>
-            </a:pPr>
-            <a:r>
-              <a:rPr sz="1500">
-                <a:solidFill>
-                  <a:srgbClr val="22282E"/>
-                </a:solidFill>
-              </a:rPr>
-              <a:t>•  Criterio de aceptación: el informe permite a un tercero reproducir el análisis (herramientas, versiones, hashes), cada hallazgo separa hecho de interpretación, la cadena de custodia no tiene huecos, y existe un resumen ejecutivo comprensible sin conocimientos técnicos.</a:t>
+              <a:t>•  Dominas la clase cuando cada conclusión puede rastrearse a una fuente, separas hecho e inferencia, declaras alternativas y limitaciones, adaptas profundidad sin cambiar los hechos y reconoces qué…</a:t>
             </a:r>
           </a:p>
         </p:txBody>
